--- a/units/unit03_fixp/fixp.pptx
+++ b/units/unit03_fixp/fixp.pptx
@@ -4088,7 +4088,7 @@
           <a:p>
             <a:r>
               <a:rPr lang="en-US" dirty="0"/>
-              <a:t>EL-GY 9463:  Introduction to Hardware Design</a:t>
+              <a:t>ECE-GY 6463:  Advanced Hardware Design</a:t>
             </a:r>
           </a:p>
           <a:p>
